--- a/courses/learn_clustering/module04-03-timing-aware-clustering/slides.pptx
+++ b/courses/learn_clustering/module04-03-timing-aware-clustering/slides.pptx
@@ -515,12 +515,6 @@
               <a:t>Critical nets should stay uncut. You’ll watch FM on criticality-weighted edges and land on cutsize three with weighted cut seven—protecting the A–B–C path.</a:t>
             </a:r>
           </a:p>
-          <a:p/>
-          <a:p>
-            <a:r>
-              <a:t>&lt;!-- algorithm-walkthrough --&gt;</a:t>
-            </a:r>
-          </a:p>
         </p:txBody>
       </p:sp>
       <p:sp>
@@ -939,12 +933,6 @@
           <a:p>
             <a:r>
               <a:t>Reweighting turns the same FM kernel into a timing-aware partitioner. Students compare plain vs weighted metrics on one seed.</a:t>
-            </a:r>
-          </a:p>
-          <a:p/>
-          <a:p>
-            <a:r>
-              <a:t>&lt;!-- /algorithm-walkthrough --&gt;</a:t>
             </a:r>
           </a:p>
         </p:txBody>
@@ -5749,7 +5737,7 @@
                 <a:spcPts val="2200"/>
               </a:lnSpc>
               <a:spcAft>
-                <a:spcPts val="600"/>
+                <a:spcPts val="400"/>
               </a:spcAft>
             </a:pPr>
             <a:r>
@@ -5768,26 +5756,7 @@
                 <a:spcPts val="2200"/>
               </a:lnSpc>
               <a:spcAft>
-                <a:spcPts val="600"/>
-              </a:spcAft>
-            </a:pPr>
-            <a:r>
-              <a:rPr sz="2000" b="0">
-                <a:solidFill>
-                  <a:srgbClr val="333333"/>
-                </a:solidFill>
-                <a:latin typeface="Consolas"/>
-              </a:rPr>
-              <a:t/>
-            </a:r>
-          </a:p>
-          <a:p>
-            <a:pPr>
-              <a:lnSpc>
-                <a:spcPts val="2200"/>
-              </a:lnSpc>
-              <a:spcAft>
-                <a:spcPts val="600"/>
+                <a:spcPts val="400"/>
               </a:spcAft>
             </a:pPr>
             <a:r>
@@ -5806,7 +5775,7 @@
                 <a:spcPts val="2200"/>
               </a:lnSpc>
               <a:spcAft>
-                <a:spcPts val="600"/>
+                <a:spcPts val="400"/>
               </a:spcAft>
             </a:pPr>
             <a:r>
@@ -5825,7 +5794,7 @@
                 <a:spcPts val="2200"/>
               </a:lnSpc>
               <a:spcAft>
-                <a:spcPts val="600"/>
+                <a:spcPts val="400"/>
               </a:spcAft>
             </a:pPr>
             <a:r>
